--- a/Courses/Software-Sciences/IT-Module-3-Web-Design/04-Website-Design/04-Website-Design.pptx
+++ b/Courses/Software-Sciences/IT-Module-3-Web-Design/04-Website-Design/04-Website-Design.pptx
@@ -364,7 +364,7 @@
           <a:p>
             <a:fld id="{4E087215-0C8F-4762-A664-737A353EC9A4}" type="datetimeFigureOut">
               <a:rPr lang="bg-BG" smtClean="0"/>
-              <a:t>26.11.25 г.</a:t>
+              <a:t>4.09.26 г.</a:t>
             </a:fld>
             <a:endParaRPr lang="bg-BG"/>
           </a:p>
@@ -560,7 +560,7 @@
           <a:p>
             <a:fld id="{72D84649-876A-46C9-8472-14CB09C070D8}" type="datetimeFigureOut">
               <a:rPr lang="en-US" smtClean="0"/>
-              <a:t>11/26/25</a:t>
+              <a:t>9/4/26</a:t>
             </a:fld>
             <a:endParaRPr lang="en-US"/>
           </a:p>
@@ -12181,8 +12181,8 @@
         </p:blipFill>
         <p:spPr>
           <a:xfrm>
-            <a:off x="611007" y="3056137"/>
-            <a:ext cx="1819960" cy="849053"/>
+            <a:off x="611007" y="3073413"/>
+            <a:ext cx="1819960" cy="814500"/>
           </a:xfrm>
           <a:prstGeom prst="rect">
             <a:avLst/>
@@ -17968,9 +17968,9 @@
                                           </p:stCondLst>
                                         </p:cTn>
                                         <p:tgtEl>
-                                          <p:spTgt spid="7">
+                                          <p:spTgt spid="6">
                                             <p:txEl>
-                                              <p:pRg st="0" end="0"/>
+                                              <p:pRg st="1" end="1"/>
                                             </p:txEl>
                                           </p:spTgt>
                                         </p:tgtEl>
@@ -18017,7 +18017,7 @@
                                           </p:stCondLst>
                                         </p:cTn>
                                         <p:tgtEl>
-                                          <p:spTgt spid="6">
+                                          <p:spTgt spid="7">
                                             <p:txEl>
                                               <p:pRg st="1" end="1"/>
                                             </p:txEl>
@@ -18066,9 +18066,9 @@
                                           </p:stCondLst>
                                         </p:cTn>
                                         <p:tgtEl>
-                                          <p:spTgt spid="7">
+                                          <p:spTgt spid="6">
                                             <p:txEl>
-                                              <p:pRg st="1" end="1"/>
+                                              <p:pRg st="2" end="2"/>
                                             </p:txEl>
                                           </p:spTgt>
                                         </p:tgtEl>
@@ -18115,7 +18115,7 @@
                                           </p:stCondLst>
                                         </p:cTn>
                                         <p:tgtEl>
-                                          <p:spTgt spid="6">
+                                          <p:spTgt spid="7">
                                             <p:txEl>
                                               <p:pRg st="2" end="2"/>
                                             </p:txEl>
@@ -18164,9 +18164,9 @@
                                           </p:stCondLst>
                                         </p:cTn>
                                         <p:tgtEl>
-                                          <p:spTgt spid="7">
+                                          <p:spTgt spid="6">
                                             <p:txEl>
-                                              <p:pRg st="2" end="2"/>
+                                              <p:pRg st="3" end="3"/>
                                             </p:txEl>
                                           </p:spTgt>
                                         </p:tgtEl>
@@ -18208,55 +18208,6 @@
                                     <p:set>
                                       <p:cBhvr>
                                         <p:cTn id="26" dur="1" fill="hold">
-                                          <p:stCondLst>
-                                            <p:cond delay="0"/>
-                                          </p:stCondLst>
-                                        </p:cTn>
-                                        <p:tgtEl>
-                                          <p:spTgt spid="6">
-                                            <p:txEl>
-                                              <p:pRg st="3" end="3"/>
-                                            </p:txEl>
-                                          </p:spTgt>
-                                        </p:tgtEl>
-                                        <p:attrNameLst>
-                                          <p:attrName>style.visibility</p:attrName>
-                                        </p:attrNameLst>
-                                      </p:cBhvr>
-                                      <p:to>
-                                        <p:strVal val="visible"/>
-                                      </p:to>
-                                    </p:set>
-                                  </p:childTnLst>
-                                </p:cTn>
-                              </p:par>
-                            </p:childTnLst>
-                          </p:cTn>
-                        </p:par>
-                      </p:childTnLst>
-                    </p:cTn>
-                  </p:par>
-                  <p:par>
-                    <p:cTn id="27" fill="hold">
-                      <p:stCondLst>
-                        <p:cond delay="indefinite"/>
-                      </p:stCondLst>
-                      <p:childTnLst>
-                        <p:par>
-                          <p:cTn id="28" fill="hold">
-                            <p:stCondLst>
-                              <p:cond delay="0"/>
-                            </p:stCondLst>
-                            <p:childTnLst>
-                              <p:par>
-                                <p:cTn id="29" presetID="1" presetClass="entr" presetSubtype="0" fill="hold" nodeType="clickEffect">
-                                  <p:stCondLst>
-                                    <p:cond delay="0"/>
-                                  </p:stCondLst>
-                                  <p:childTnLst>
-                                    <p:set>
-                                      <p:cBhvr>
-                                        <p:cTn id="30" dur="1" fill="hold">
                                           <p:stCondLst>
                                             <p:cond delay="0"/>
                                           </p:stCondLst>
@@ -21930,42 +21881,58 @@
           <a:p>
             <a:pPr lvl="1"/>
             <a:r>
-              <a:rPr lang="bg-BG" sz="3000" dirty="0"/>
+              <a:rPr lang="bg-BG" sz="3000" b="1" dirty="0">
+                <a:solidFill>
+                  <a:schemeClr val="bg1"/>
+                </a:solidFill>
+              </a:rPr>
               <a:t>Начало</a:t>
             </a:r>
           </a:p>
           <a:p>
             <a:pPr lvl="1"/>
             <a:r>
-              <a:rPr lang="bg-BG" sz="3000" dirty="0"/>
+              <a:rPr lang="bg-BG" sz="3000" b="1" dirty="0">
+                <a:solidFill>
+                  <a:schemeClr val="bg1"/>
+                </a:solidFill>
+              </a:rPr>
               <a:t>Учебна дейност</a:t>
             </a:r>
           </a:p>
           <a:p>
             <a:pPr lvl="2"/>
             <a:r>
-              <a:rPr lang="bg-BG" sz="2800" dirty="0"/>
+              <a:rPr lang="bg-BG" sz="2800" b="1" dirty="0"/>
               <a:t>Учебни програми</a:t>
             </a:r>
           </a:p>
           <a:p>
             <a:pPr lvl="2"/>
             <a:r>
-              <a:rPr lang="bg-BG" sz="2800" dirty="0"/>
+              <a:rPr lang="bg-BG" sz="2800" b="1" dirty="0"/>
               <a:t>Извънкласни дейности</a:t>
             </a:r>
           </a:p>
           <a:p>
             <a:pPr lvl="1"/>
             <a:r>
-              <a:rPr lang="bg-BG" sz="3000" dirty="0"/>
+              <a:rPr lang="bg-BG" sz="3000" b="1" dirty="0">
+                <a:solidFill>
+                  <a:schemeClr val="bg1"/>
+                </a:solidFill>
+              </a:rPr>
               <a:t>Събития</a:t>
             </a:r>
           </a:p>
           <a:p>
             <a:pPr lvl="1"/>
             <a:r>
-              <a:rPr lang="bg-BG" sz="3000" dirty="0"/>
+              <a:rPr lang="bg-BG" sz="3000" b="1" dirty="0">
+                <a:solidFill>
+                  <a:schemeClr val="bg1"/>
+                </a:solidFill>
+              </a:rPr>
               <a:t>Контакти</a:t>
             </a:r>
           </a:p>
